--- a/public/fun/pack/pptx/reviewpro/보장점검양식프리미엄_21_본인점검_스카이펄.pptx
+++ b/public/fun/pack/pptx/reviewpro/보장점검양식프리미엄_21_본인점검_스카이펄.pptx
@@ -112,12 +112,12 @@
   <p:extLst>
     <p:ext uri="{521415D9-36F7-43E2-AB2F-B90AF26B5E84}">
       <p14:sectionLst xmlns:p14="http://schemas.microsoft.com/office/powerpoint/2010/main">
-        <p14:section name="시작" id="{1664000A-F22E-4B4B-A25E-63C6F281E6FE}">
+        <p14:section name="시작" id="{C0DD726F-9667-4AE3-BF6A-94F05B6F50D8}">
           <p14:sldIdLst>
             <p14:sldId id="256"/>
           </p14:sldIdLst>
         </p14:section>
-        <p14:section name="본문" id="{773BD243-C612-4BA7-AAB8-C59E7A7306C6}">
+        <p14:section name="본문" id="{77B1FFD0-37E1-470D-AD7C-FBFDC7254992}">
           <p14:sldIdLst>
             <p14:sldId id="257"/>
             <p14:sldId id="258"/>
@@ -1608,7 +1608,7 @@
             </a:lvl1pPr>
           </a:lstStyle>
           <a:p>
-            <a:fld id="{F6F0FB01-EBF4-4926-BBE9-46BCAC3E1B0C}" type="slidenum">
+            <a:fld id="{077BE026-1264-419E-93EB-E2A1568933A7}" type="slidenum">
               <a:rPr lang="en-US"/>
               <a:t>‹#›</a:t>
             </a:fld>
@@ -2313,7 +2313,7 @@
             </a:lvl1pPr>
           </a:lstStyle>
           <a:p>
-            <a:fld id="{04FABB3A-DA4C-47C2-AB56-EE27B8A9DA63}" type="slidenum">
+            <a:fld id="{DBB5EA1F-97FC-42FD-BD1C-69765653109F}" type="slidenum">
               <a:rPr lang="en-US"/>
               <a:t>‹#›</a:t>
             </a:fld>
@@ -2991,7 +2991,7 @@
             </a:lvl1pPr>
           </a:lstStyle>
           <a:p>
-            <a:fld id="{541F6F61-E704-4030-BD11-9848ACC1FB68}" type="slidenum">
+            <a:fld id="{812B2853-1FFE-4D24-BA9D-86B0651AE1DC}" type="slidenum">
               <a:rPr lang="en-US"/>
               <a:t>‹#›</a:t>
             </a:fld>
@@ -3832,7 +3832,7 @@
           <a:p>
             <a:r>
               <a:rPr lang="ko-KR"/>
-              <a:t>휴가 가기 전에 한 번 훑어봅니다</a:t>
+              <a:t>바쁘기 전에 한 번 훑어봅니다</a:t>
             </a:r>
           </a:p>
         </p:txBody>
@@ -3854,7 +3854,7 @@
           <a:p>
             <a:r>
               <a:rPr lang="ko-KR"/>
-              <a:t>본인 점검 · 0000. 00. 00</a:t>
+              <a:t>본인 점검 · 날짜 입력</a:t>
             </a:r>
           </a:p>
           <a:p>
@@ -3945,7 +3945,7 @@
           <a:bodyPr/>
           <a:lstStyle/>
           <a:p>
-            <a:fld id="{9F46F5C4-E6D9-46E9-9A1B-67A56CE4D670}" type="slidenum">
+            <a:fld id="{84B183EA-EC20-494A-B754-6485B81D5CB2}" type="slidenum">
               <a:rPr lang="en-US"/>
               <a:t>‹#›</a:t>
             </a:fld>
@@ -4461,7 +4461,7 @@
           <a:bodyPr/>
           <a:lstStyle/>
           <a:p>
-            <a:fld id="{74B64D55-FA4A-4120-8CA6-44AAF9263380}" type="slidenum">
+            <a:fld id="{1B2F9E4B-0881-4754-B534-EFE4208FAC17}" type="slidenum">
               <a:rPr lang="en-US"/>
               <a:t>‹#›</a:t>
             </a:fld>
@@ -5967,7 +5967,7 @@
           <a:bodyPr/>
           <a:lstStyle/>
           <a:p>
-            <a:fld id="{80FE0FA5-191D-4A46-B3BB-746FBA5D1DC6}" type="slidenum">
+            <a:fld id="{B3132BA2-5625-4DE9-8BD1-511140E81BA4}" type="slidenum">
               <a:rPr lang="en-US"/>
               <a:t>‹#›</a:t>
             </a:fld>
@@ -7517,7 +7517,7 @@
           <a:bodyPr/>
           <a:lstStyle/>
           <a:p>
-            <a:fld id="{DB7F0EFE-8A5B-46ED-98DD-D7432FC1696B}" type="slidenum">
+            <a:fld id="{D6F7F76F-5D04-4515-8E63-19D46F4D92E3}" type="slidenum">
               <a:rPr lang="en-US"/>
               <a:t>‹#›</a:t>
             </a:fld>
@@ -8463,7 +8463,7 @@
           <a:bodyPr/>
           <a:lstStyle/>
           <a:p>
-            <a:fld id="{248F909D-7253-40EA-88D5-FD8105A822CA}" type="slidenum">
+            <a:fld id="{77ACC0AA-68EE-4EA3-99E5-C7EB7863625B}" type="slidenum">
               <a:rPr lang="en-US"/>
               <a:t>‹#›</a:t>
             </a:fld>
